--- a/assets/pptx/catalog-195.pptx
+++ b/assets/pptx/catalog-195.pptx
@@ -3403,7 +3403,7 @@
                 <a:ea typeface="Ebrima"/>
                 <a:cs typeface="Ebrima"/>
               </a:rPr>
-              <a:t>የእኔ ውድ ከዝህ ሁሉ ልዩ (2×)</a:t>
+              <a:t>የእኔ ውድ ከዝህ ሁሉ ልዩ 2×</a:t>
             </a:r>
           </a:p>
           <a:p>
@@ -3421,7 +3421,7 @@
                 <a:ea typeface="Ebrima"/>
                 <a:cs typeface="Ebrima"/>
               </a:rPr>
-              <a:t>ችሎኛል ሰዎች ይህንን ስሙኙ (2×)</a:t>
+              <a:t>ችሎኛል ሰዎች ይህንን ስሙኙ 2×</a:t>
             </a:r>
           </a:p>
         </p:txBody>
@@ -3524,7 +3524,7 @@
                 <a:ea typeface="Ebrima"/>
                 <a:cs typeface="Ebrima"/>
               </a:rPr>
-              <a:t>ኢየሱስ ብዙ ትቶልናል (2×)</a:t>
+              <a:t>ኢየሱስ ብዙ ትቶልናል 2×</a:t>
             </a:r>
           </a:p>
           <a:p>
@@ -3542,7 +3542,7 @@
                 <a:ea typeface="Ebrima"/>
                 <a:cs typeface="Ebrima"/>
               </a:rPr>
-              <a:t>ምሕረት ዛሬም ያኖረናል (2×)</a:t>
+              <a:t>ምሕረት ዛሬም ያኖረናል 2×</a:t>
             </a:r>
           </a:p>
         </p:txBody>
@@ -3645,7 +3645,7 @@
                 <a:ea typeface="Ebrima"/>
                 <a:cs typeface="Ebrima"/>
               </a:rPr>
-              <a:t>ኢየሱስ የሰውን ድካም ያውቃል (2×)</a:t>
+              <a:t>ኢየሱስ የሰውን ድካም ያውቃል 2×</a:t>
             </a:r>
           </a:p>
           <a:p>
@@ -3663,7 +3663,7 @@
                 <a:ea typeface="Ebrima"/>
                 <a:cs typeface="Ebrima"/>
               </a:rPr>
-              <a:t>ከአመድ ላይ ምስኪኑን ያነሳል (2×)</a:t>
+              <a:t>ከአመድ ላይ ምስኪኑን ያነሳል 2×</a:t>
             </a:r>
           </a:p>
         </p:txBody>
@@ -3766,7 +3766,7 @@
                 <a:ea typeface="Ebrima"/>
                 <a:cs typeface="Ebrima"/>
               </a:rPr>
-              <a:t>ውበቴ ድምቀቴ ሽቶዬ (2×)</a:t>
+              <a:t>ውበቴ ድምቀቴ ሽቶዬ 2×</a:t>
             </a:r>
           </a:p>
           <a:p>
@@ -3784,7 +3784,7 @@
                 <a:ea typeface="Ebrima"/>
                 <a:cs typeface="Ebrima"/>
               </a:rPr>
-              <a:t>ጠረኔ ሆነልኝ ጌታዬ (2×)</a:t>
+              <a:t>ጠረኔ ሆነልኝ ጌታዬ 2×</a:t>
             </a:r>
           </a:p>
         </p:txBody>
@@ -3887,7 +3887,7 @@
                 <a:ea typeface="Ebrima"/>
                 <a:cs typeface="Ebrima"/>
               </a:rPr>
-              <a:t>በብዙ ምሥጋና ፊቱ እቀርባለሁ (4×)</a:t>
+              <a:t>በብዙ ምሥጋና ፊቱ እቀርባለሁ 4×</a:t>
             </a:r>
           </a:p>
           <a:p>
@@ -3905,7 +3905,7 @@
                 <a:ea typeface="Ebrima"/>
                 <a:cs typeface="Ebrima"/>
               </a:rPr>
-              <a:t>በብዙ ዝማሬ ጌታን አከብራለሁ (4×)</a:t>
+              <a:t>በብዙ ዝማሬ ጌታን አከብራለሁ 4×</a:t>
             </a:r>
           </a:p>
         </p:txBody>
